--- a/curso_es/pptx/S75.pptx
+++ b/curso_es/pptx/S75.pptx
@@ -3905,7 +3905,7 @@
                 </a:solidFill>
                 <a:latin typeface="Nunito Sans"/>
               </a:rPr>
-              <a:t>Naiara piensa: «Leire pasa de mí» y se enfada. Una hora después, Leire escribe: «Perdona, me quedé sin batería en el metro».</a:t>
+              <a:t>Una chica piensa: «Mi amiga pasa de mí» y se enfada. Una hora después, la amiga escribe: «Perdona, me quedé sin batería en el metro».</a:t>
             </a:r>
           </a:p>
         </p:txBody>
@@ -3953,7 +3953,7 @@
                 </a:solidFill>
                 <a:latin typeface="Nunito Sans"/>
               </a:rPr>
-              <a:t>¿Qué pasó? Leire leyó el mensaje y no contestó.</a:t>
+              <a:t>¿Qué pasó? La amiga leyó el mensaje y no contestó.</a:t>
             </a:r>
           </a:p>
           <a:p>
@@ -3978,7 +3978,7 @@
                 </a:solidFill>
                 <a:latin typeface="Nunito Sans"/>
               </a:rPr>
-              <a:t>¿Qué idea tuvo Naiara? «Pasa de mí». De esa idea salió el enfado.</a:t>
+              <a:t>¿Qué idea tuvo la chica? «Pasa de mí». De esa idea salió el enfado.</a:t>
             </a:r>
           </a:p>
           <a:p>
@@ -4214,7 +4214,7 @@
                 </a:solidFill>
                 <a:latin typeface="Nunito Sans"/>
               </a:rPr>
-              <a:t>En Aste Nagusia, a Iker se le cae el bocadillo porque Aitor le empuja sin querer. Iker, furioso, le suelta un insulto delante de todos.</a:t>
+              <a:t>En Aste Nagusia, a un chico se le cae el bocadillo porque otro le empuja sin querer. El primero, furioso, le suelta un insulto delante de todos.</a:t>
             </a:r>
           </a:p>
         </p:txBody>
@@ -4523,7 +4523,7 @@
                 </a:solidFill>
                 <a:latin typeface="Nunito Sans"/>
               </a:rPr>
-              <a:t>Kevin empuja a Omar en el patio. Luego explica: «Estaba enfadado. Y en clase dijimos que las emociones no son malas».</a:t>
+              <a:t>Un chico empuja a otro en el patio. Luego explica: «Estaba enfadado. Y en clase dijimos que las emociones no son malas».</a:t>
             </a:r>
           </a:p>
         </p:txBody>
@@ -4571,7 +4571,7 @@
                 </a:solidFill>
                 <a:latin typeface="Nunito Sans"/>
               </a:rPr>
-              <a:t>Si las emociones no son malas, ¿Kevin no ha hecho nada malo?</a:t>
+              <a:t>Si las emociones no son malas, ¿ese chico no ha hecho nada malo?</a:t>
             </a:r>
           </a:p>
           <a:p>
@@ -4596,7 +4596,7 @@
                 </a:solidFill>
                 <a:latin typeface="Nunito Sans"/>
               </a:rPr>
-              <a:t>Parece que Kevin tiene razón: hemos dicho que enfadarse no es malo.</a:t>
+              <a:t>Parece que ese chico tiene razón: hemos dicho que enfadarse no es malo.</a:t>
             </a:r>
           </a:p>
           <a:p>
@@ -4621,7 +4621,7 @@
                 </a:solidFill>
                 <a:latin typeface="Nunito Sans"/>
               </a:rPr>
-              <a:t>Pero Kevin no se ha limitado a sentir: ha empujado. Eso es una conducta.</a:t>
+              <a:t>Pero no se ha limitado a sentir: ha empujado. Eso es una conducta.</a:t>
             </a:r>
           </a:p>
           <a:p>
@@ -4975,7 +4975,7 @@
                 </a:solidFill>
                 <a:latin typeface="Nunito Sans"/>
               </a:rPr>
-              <a:t> «Estoy enfadado». Ponerle nombre ya ayuda a pensar.</a:t>
+              <a:t> «Estoy enfadado».</a:t>
             </a:r>
           </a:p>
           <a:p>
@@ -6150,7 +6150,7 @@
                 </a:solidFill>
                 <a:latin typeface="Nunito Sans"/>
               </a:rPr>
-              <a:t>Para Kohlberg, el nivel moral no se ve en la respuesta, sino en las ______.  (sesión 74)</a:t>
+              <a:t>El nivel moral no se ve en la respuesta, sino en las ______.  (sesión 74)</a:t>
             </a:r>
           </a:p>
           <a:p>
@@ -6352,7 +6352,7 @@
                 </a:solidFill>
                 <a:latin typeface="Nunito Sans"/>
               </a:rPr>
-              <a:t>Para Kohlberg, el nivel moral no se ve en la respuesta, sino en las </a:t>
+              <a:t>El nivel moral no se ve en la respuesta, sino en las </a:t>
             </a:r>
             <a:r>
               <a:rPr sz="2600" b="1">
@@ -6603,7 +6603,7 @@
                 </a:solidFill>
                 <a:latin typeface="Nunito Sans"/>
               </a:rPr>
-              <a:t>Naiara ve que Leire ha leído su mensaje hace una hora y no contesta. Se enfada. Escribe «Pues vale, pasa de mí» y lo envía.</a:t>
+              <a:t>Una chica ve que una amiga ha leído su mensaje hace una hora y no contesta. Se enfada. Escribe «Pues vale, pasa de mí» y lo envía.</a:t>
             </a:r>
           </a:p>
         </p:txBody>
@@ -6642,7 +6642,7 @@
                 </a:solidFill>
                 <a:latin typeface="Nunito Sans"/>
               </a:rPr>
-              <a:t>¿Qué ha sentido Naiara? ¿Tenía razones para sentirlo?</a:t>
+              <a:t>¿Qué ha sentido esa chica? ¿Tenía razones para sentirlo?</a:t>
             </a:r>
           </a:p>
         </p:txBody>
